--- a/bakeoff/outputs/strategy-baseline.pptx
+++ b/bakeoff/outputs/strategy-baseline.pptx
@@ -1351,7 +1351,7 @@
               <a:lstStyle/>
               <a:p>
                 <a:pPr>
-                  <a:defRPr b="0" i="0" strike="noStrike" sz="700" u="none">
+                  <a:defRPr b="0" i="0" strike="noStrike" sz="900" u="none">
                     <a:solidFill>
                       <a:srgbClr val="000000"/>
                     </a:solidFill>
@@ -1452,7 +1452,7 @@
               <a:lstStyle/>
               <a:p>
                 <a:pPr>
-                  <a:defRPr b="0" i="0" strike="noStrike" sz="700" u="none">
+                  <a:defRPr b="0" i="0" strike="noStrike" sz="900" u="none">
                     <a:solidFill>
                       <a:srgbClr val="000000"/>
                     </a:solidFill>
@@ -1532,7 +1532,7 @@
             <a:lstStyle/>
             <a:p>
               <a:pPr>
-                <a:defRPr b="0" i="0" strike="noStrike" sz="700" u="none">
+                <a:defRPr b="0" i="0" strike="noStrike" sz="900" u="none">
                   <a:solidFill>
                     <a:srgbClr val="000000"/>
                   </a:solidFill>
@@ -1580,7 +1580,7 @@
           <a:lstStyle/>
           <a:p>
             <a:pPr>
-              <a:defRPr sz="750" b="0" i="0" u="none" strike="noStrike">
+              <a:defRPr sz="900" b="0" i="0" u="none" strike="noStrike">
                 <a:solidFill>
                   <a:srgbClr val="94A3B8"/>
                 </a:solidFill>
@@ -1632,7 +1632,7 @@
           <a:lstStyle/>
           <a:p>
             <a:pPr>
-              <a:defRPr sz="750" b="0" i="0" u="none" strike="noStrike">
+              <a:defRPr sz="900" b="0" i="0" u="none" strike="noStrike">
                 <a:solidFill>
                   <a:srgbClr val="94A3B8"/>
                 </a:solidFill>
@@ -1662,7 +1662,7 @@
         <a:lstStyle/>
         <a:p>
           <a:pPr>
-            <a:defRPr sz="750">      </a:defRPr>
+            <a:defRPr sz="900">      </a:defRPr>
           </a:pPr>
           <a:endParaRPr lang="en-US"/>
         </a:p>
@@ -13285,7 +13285,7 @@
         <p:spPr>
           <a:xfrm>
             <a:off x="137160" y="3163824"/>
-            <a:ext cx="1261872" cy="246888"/>
+            <a:ext cx="1261872" cy="283464"/>
           </a:xfrm>
           <a:prstGeom prst="rect">
             <a:avLst/>
@@ -13310,7 +13310,7 @@
         <p:spPr>
           <a:xfrm>
             <a:off x="192024" y="3163824"/>
-            <a:ext cx="1188720" cy="246888"/>
+            <a:ext cx="1188720" cy="283464"/>
           </a:xfrm>
           <a:prstGeom prst="rect">
             <a:avLst/>
@@ -13346,7 +13346,7 @@
         <p:spPr>
           <a:xfrm>
             <a:off x="1399032" y="3163824"/>
-            <a:ext cx="749808" cy="246888"/>
+            <a:ext cx="749808" cy="283464"/>
           </a:xfrm>
           <a:prstGeom prst="rect">
             <a:avLst/>
@@ -13371,7 +13371,7 @@
         <p:spPr>
           <a:xfrm>
             <a:off x="1453896" y="3163824"/>
-            <a:ext cx="676656" cy="246888"/>
+            <a:ext cx="676656" cy="283464"/>
           </a:xfrm>
           <a:prstGeom prst="rect">
             <a:avLst/>
@@ -13407,7 +13407,7 @@
         <p:spPr>
           <a:xfrm>
             <a:off x="2148840" y="3163824"/>
-            <a:ext cx="594360" cy="246888"/>
+            <a:ext cx="594360" cy="283464"/>
           </a:xfrm>
           <a:prstGeom prst="rect">
             <a:avLst/>
@@ -13432,7 +13432,7 @@
         <p:spPr>
           <a:xfrm>
             <a:off x="2203704" y="3163824"/>
-            <a:ext cx="521208" cy="246888"/>
+            <a:ext cx="521208" cy="283464"/>
           </a:xfrm>
           <a:prstGeom prst="rect">
             <a:avLst/>
@@ -13468,7 +13468,7 @@
         <p:spPr>
           <a:xfrm>
             <a:off x="2743200" y="3163824"/>
-            <a:ext cx="2212848" cy="246888"/>
+            <a:ext cx="2212848" cy="283464"/>
           </a:xfrm>
           <a:prstGeom prst="rect">
             <a:avLst/>
@@ -13493,7 +13493,7 @@
         <p:spPr>
           <a:xfrm>
             <a:off x="2798064" y="3163824"/>
-            <a:ext cx="2139696" cy="246888"/>
+            <a:ext cx="2139696" cy="283464"/>
           </a:xfrm>
           <a:prstGeom prst="rect">
             <a:avLst/>
@@ -13529,7 +13529,7 @@
         <p:spPr>
           <a:xfrm>
             <a:off x="4956048" y="3163824"/>
-            <a:ext cx="1097280" cy="246888"/>
+            <a:ext cx="1097280" cy="283464"/>
           </a:xfrm>
           <a:prstGeom prst="rect">
             <a:avLst/>
@@ -13554,7 +13554,7 @@
         <p:spPr>
           <a:xfrm>
             <a:off x="5010912" y="3163824"/>
-            <a:ext cx="1024128" cy="246888"/>
+            <a:ext cx="1024128" cy="283464"/>
           </a:xfrm>
           <a:prstGeom prst="rect">
             <a:avLst/>
@@ -13589,8 +13589,8 @@
         </p:nvSpPr>
         <p:spPr>
           <a:xfrm>
-            <a:off x="137160" y="3410712"/>
-            <a:ext cx="1261872" cy="246888"/>
+            <a:off x="137160" y="3447288"/>
+            <a:ext cx="1261872" cy="283464"/>
           </a:xfrm>
           <a:prstGeom prst="rect">
             <a:avLst/>
@@ -13614,8 +13614,8 @@
         </p:nvSpPr>
         <p:spPr>
           <a:xfrm>
-            <a:off x="192024" y="3410712"/>
-            <a:ext cx="1188720" cy="246888"/>
+            <a:off x="192024" y="3447288"/>
+            <a:ext cx="1188720" cy="283464"/>
           </a:xfrm>
           <a:prstGeom prst="rect">
             <a:avLst/>
@@ -13650,8 +13650,8 @@
         </p:nvSpPr>
         <p:spPr>
           <a:xfrm>
-            <a:off x="1399032" y="3410712"/>
-            <a:ext cx="749808" cy="246888"/>
+            <a:off x="1399032" y="3447288"/>
+            <a:ext cx="749808" cy="283464"/>
           </a:xfrm>
           <a:prstGeom prst="rect">
             <a:avLst/>
@@ -13675,8 +13675,8 @@
         </p:nvSpPr>
         <p:spPr>
           <a:xfrm>
-            <a:off x="1453896" y="3410712"/>
-            <a:ext cx="676656" cy="246888"/>
+            <a:off x="1453896" y="3447288"/>
+            <a:ext cx="676656" cy="283464"/>
           </a:xfrm>
           <a:prstGeom prst="rect">
             <a:avLst/>
@@ -13711,8 +13711,8 @@
         </p:nvSpPr>
         <p:spPr>
           <a:xfrm>
-            <a:off x="2148840" y="3410712"/>
-            <a:ext cx="594360" cy="246888"/>
+            <a:off x="2148840" y="3447288"/>
+            <a:ext cx="594360" cy="283464"/>
           </a:xfrm>
           <a:prstGeom prst="rect">
             <a:avLst/>
@@ -13736,8 +13736,8 @@
         </p:nvSpPr>
         <p:spPr>
           <a:xfrm>
-            <a:off x="2203704" y="3410712"/>
-            <a:ext cx="521208" cy="246888"/>
+            <a:off x="2203704" y="3447288"/>
+            <a:ext cx="521208" cy="283464"/>
           </a:xfrm>
           <a:prstGeom prst="rect">
             <a:avLst/>
@@ -13772,8 +13772,8 @@
         </p:nvSpPr>
         <p:spPr>
           <a:xfrm>
-            <a:off x="2743200" y="3410712"/>
-            <a:ext cx="2212848" cy="246888"/>
+            <a:off x="2743200" y="3447288"/>
+            <a:ext cx="2212848" cy="283464"/>
           </a:xfrm>
           <a:prstGeom prst="rect">
             <a:avLst/>
@@ -13797,8 +13797,8 @@
         </p:nvSpPr>
         <p:spPr>
           <a:xfrm>
-            <a:off x="2798064" y="3410712"/>
-            <a:ext cx="2139696" cy="246888"/>
+            <a:off x="2798064" y="3447288"/>
+            <a:ext cx="2139696" cy="283464"/>
           </a:xfrm>
           <a:prstGeom prst="rect">
             <a:avLst/>
@@ -13833,8 +13833,8 @@
         </p:nvSpPr>
         <p:spPr>
           <a:xfrm>
-            <a:off x="4956048" y="3410712"/>
-            <a:ext cx="1097280" cy="246888"/>
+            <a:off x="4956048" y="3447288"/>
+            <a:ext cx="1097280" cy="283464"/>
           </a:xfrm>
           <a:prstGeom prst="rect">
             <a:avLst/>
@@ -13858,8 +13858,8 @@
         </p:nvSpPr>
         <p:spPr>
           <a:xfrm>
-            <a:off x="5010912" y="3410712"/>
-            <a:ext cx="1024128" cy="246888"/>
+            <a:off x="5010912" y="3447288"/>
+            <a:ext cx="1024128" cy="283464"/>
           </a:xfrm>
           <a:prstGeom prst="rect">
             <a:avLst/>
@@ -13894,8 +13894,8 @@
         </p:nvSpPr>
         <p:spPr>
           <a:xfrm>
-            <a:off x="137160" y="3657600"/>
-            <a:ext cx="1261872" cy="246888"/>
+            <a:off x="137160" y="3730752"/>
+            <a:ext cx="1261872" cy="283464"/>
           </a:xfrm>
           <a:prstGeom prst="rect">
             <a:avLst/>
@@ -13919,8 +13919,8 @@
         </p:nvSpPr>
         <p:spPr>
           <a:xfrm>
-            <a:off x="192024" y="3657600"/>
-            <a:ext cx="1188720" cy="246888"/>
+            <a:off x="192024" y="3730752"/>
+            <a:ext cx="1188720" cy="283464"/>
           </a:xfrm>
           <a:prstGeom prst="rect">
             <a:avLst/>
@@ -13955,8 +13955,8 @@
         </p:nvSpPr>
         <p:spPr>
           <a:xfrm>
-            <a:off x="1399032" y="3657600"/>
-            <a:ext cx="749808" cy="246888"/>
+            <a:off x="1399032" y="3730752"/>
+            <a:ext cx="749808" cy="283464"/>
           </a:xfrm>
           <a:prstGeom prst="rect">
             <a:avLst/>
@@ -13980,8 +13980,8 @@
         </p:nvSpPr>
         <p:spPr>
           <a:xfrm>
-            <a:off x="1453896" y="3657600"/>
-            <a:ext cx="676656" cy="246888"/>
+            <a:off x="1453896" y="3730752"/>
+            <a:ext cx="676656" cy="283464"/>
           </a:xfrm>
           <a:prstGeom prst="rect">
             <a:avLst/>
@@ -14016,8 +14016,8 @@
         </p:nvSpPr>
         <p:spPr>
           <a:xfrm>
-            <a:off x="2148840" y="3657600"/>
-            <a:ext cx="594360" cy="246888"/>
+            <a:off x="2148840" y="3730752"/>
+            <a:ext cx="594360" cy="283464"/>
           </a:xfrm>
           <a:prstGeom prst="rect">
             <a:avLst/>
@@ -14041,8 +14041,8 @@
         </p:nvSpPr>
         <p:spPr>
           <a:xfrm>
-            <a:off x="2203704" y="3657600"/>
-            <a:ext cx="521208" cy="246888"/>
+            <a:off x="2203704" y="3730752"/>
+            <a:ext cx="521208" cy="283464"/>
           </a:xfrm>
           <a:prstGeom prst="rect">
             <a:avLst/>
@@ -14077,8 +14077,8 @@
         </p:nvSpPr>
         <p:spPr>
           <a:xfrm>
-            <a:off x="2743200" y="3657600"/>
-            <a:ext cx="2212848" cy="246888"/>
+            <a:off x="2743200" y="3730752"/>
+            <a:ext cx="2212848" cy="283464"/>
           </a:xfrm>
           <a:prstGeom prst="rect">
             <a:avLst/>
@@ -14102,8 +14102,8 @@
         </p:nvSpPr>
         <p:spPr>
           <a:xfrm>
-            <a:off x="2798064" y="3657600"/>
-            <a:ext cx="2139696" cy="246888"/>
+            <a:off x="2798064" y="3730752"/>
+            <a:ext cx="2139696" cy="283464"/>
           </a:xfrm>
           <a:prstGeom prst="rect">
             <a:avLst/>
@@ -14138,8 +14138,8 @@
         </p:nvSpPr>
         <p:spPr>
           <a:xfrm>
-            <a:off x="4956048" y="3657600"/>
-            <a:ext cx="1097280" cy="246888"/>
+            <a:off x="4956048" y="3730752"/>
+            <a:ext cx="1097280" cy="283464"/>
           </a:xfrm>
           <a:prstGeom prst="rect">
             <a:avLst/>
@@ -14163,8 +14163,8 @@
         </p:nvSpPr>
         <p:spPr>
           <a:xfrm>
-            <a:off x="5010912" y="3657600"/>
-            <a:ext cx="1024128" cy="246888"/>
+            <a:off x="5010912" y="3730752"/>
+            <a:ext cx="1024128" cy="283464"/>
           </a:xfrm>
           <a:prstGeom prst="rect">
             <a:avLst/>
@@ -14199,8 +14199,8 @@
         </p:nvSpPr>
         <p:spPr>
           <a:xfrm>
-            <a:off x="137160" y="3904488"/>
-            <a:ext cx="1261872" cy="246888"/>
+            <a:off x="137160" y="4014216"/>
+            <a:ext cx="1261872" cy="283464"/>
           </a:xfrm>
           <a:prstGeom prst="rect">
             <a:avLst/>
@@ -14224,8 +14224,8 @@
         </p:nvSpPr>
         <p:spPr>
           <a:xfrm>
-            <a:off x="192024" y="3904488"/>
-            <a:ext cx="1188720" cy="246888"/>
+            <a:off x="192024" y="4014216"/>
+            <a:ext cx="1188720" cy="283464"/>
           </a:xfrm>
           <a:prstGeom prst="rect">
             <a:avLst/>
@@ -14260,8 +14260,8 @@
         </p:nvSpPr>
         <p:spPr>
           <a:xfrm>
-            <a:off x="1399032" y="3904488"/>
-            <a:ext cx="749808" cy="246888"/>
+            <a:off x="1399032" y="4014216"/>
+            <a:ext cx="749808" cy="283464"/>
           </a:xfrm>
           <a:prstGeom prst="rect">
             <a:avLst/>
@@ -14285,8 +14285,8 @@
         </p:nvSpPr>
         <p:spPr>
           <a:xfrm>
-            <a:off x="1453896" y="3904488"/>
-            <a:ext cx="676656" cy="246888"/>
+            <a:off x="1453896" y="4014216"/>
+            <a:ext cx="676656" cy="283464"/>
           </a:xfrm>
           <a:prstGeom prst="rect">
             <a:avLst/>
@@ -14321,8 +14321,8 @@
         </p:nvSpPr>
         <p:spPr>
           <a:xfrm>
-            <a:off x="2148840" y="3904488"/>
-            <a:ext cx="594360" cy="246888"/>
+            <a:off x="2148840" y="4014216"/>
+            <a:ext cx="594360" cy="283464"/>
           </a:xfrm>
           <a:prstGeom prst="rect">
             <a:avLst/>
@@ -14346,8 +14346,8 @@
         </p:nvSpPr>
         <p:spPr>
           <a:xfrm>
-            <a:off x="2203704" y="3904488"/>
-            <a:ext cx="521208" cy="246888"/>
+            <a:off x="2203704" y="4014216"/>
+            <a:ext cx="521208" cy="283464"/>
           </a:xfrm>
           <a:prstGeom prst="rect">
             <a:avLst/>
@@ -14382,8 +14382,8 @@
         </p:nvSpPr>
         <p:spPr>
           <a:xfrm>
-            <a:off x="2743200" y="3904488"/>
-            <a:ext cx="2212848" cy="246888"/>
+            <a:off x="2743200" y="4014216"/>
+            <a:ext cx="2212848" cy="283464"/>
           </a:xfrm>
           <a:prstGeom prst="rect">
             <a:avLst/>
@@ -14407,8 +14407,8 @@
         </p:nvSpPr>
         <p:spPr>
           <a:xfrm>
-            <a:off x="2798064" y="3904488"/>
-            <a:ext cx="2139696" cy="246888"/>
+            <a:off x="2798064" y="4014216"/>
+            <a:ext cx="2139696" cy="283464"/>
           </a:xfrm>
           <a:prstGeom prst="rect">
             <a:avLst/>
@@ -14443,8 +14443,8 @@
         </p:nvSpPr>
         <p:spPr>
           <a:xfrm>
-            <a:off x="4956048" y="3904488"/>
-            <a:ext cx="1097280" cy="246888"/>
+            <a:off x="4956048" y="4014216"/>
+            <a:ext cx="1097280" cy="283464"/>
           </a:xfrm>
           <a:prstGeom prst="rect">
             <a:avLst/>
@@ -14468,8 +14468,8 @@
         </p:nvSpPr>
         <p:spPr>
           <a:xfrm>
-            <a:off x="5010912" y="3904488"/>
-            <a:ext cx="1024128" cy="246888"/>
+            <a:off x="5010912" y="4014216"/>
+            <a:ext cx="1024128" cy="283464"/>
           </a:xfrm>
           <a:prstGeom prst="rect">
             <a:avLst/>
@@ -14504,8 +14504,8 @@
         </p:nvSpPr>
         <p:spPr>
           <a:xfrm>
-            <a:off x="137160" y="4151376"/>
-            <a:ext cx="1261872" cy="246888"/>
+            <a:off x="137160" y="4297680"/>
+            <a:ext cx="1261872" cy="283464"/>
           </a:xfrm>
           <a:prstGeom prst="rect">
             <a:avLst/>
@@ -14529,8 +14529,8 @@
         </p:nvSpPr>
         <p:spPr>
           <a:xfrm>
-            <a:off x="192024" y="4151376"/>
-            <a:ext cx="1188720" cy="246888"/>
+            <a:off x="192024" y="4297680"/>
+            <a:ext cx="1188720" cy="283464"/>
           </a:xfrm>
           <a:prstGeom prst="rect">
             <a:avLst/>
@@ -14565,8 +14565,8 @@
         </p:nvSpPr>
         <p:spPr>
           <a:xfrm>
-            <a:off x="1399032" y="4151376"/>
-            <a:ext cx="749808" cy="246888"/>
+            <a:off x="1399032" y="4297680"/>
+            <a:ext cx="749808" cy="283464"/>
           </a:xfrm>
           <a:prstGeom prst="rect">
             <a:avLst/>
@@ -14590,8 +14590,8 @@
         </p:nvSpPr>
         <p:spPr>
           <a:xfrm>
-            <a:off x="1453896" y="4151376"/>
-            <a:ext cx="676656" cy="246888"/>
+            <a:off x="1453896" y="4297680"/>
+            <a:ext cx="676656" cy="283464"/>
           </a:xfrm>
           <a:prstGeom prst="rect">
             <a:avLst/>
@@ -14626,8 +14626,8 @@
         </p:nvSpPr>
         <p:spPr>
           <a:xfrm>
-            <a:off x="2148840" y="4151376"/>
-            <a:ext cx="594360" cy="246888"/>
+            <a:off x="2148840" y="4297680"/>
+            <a:ext cx="594360" cy="283464"/>
           </a:xfrm>
           <a:prstGeom prst="rect">
             <a:avLst/>
@@ -14651,8 +14651,8 @@
         </p:nvSpPr>
         <p:spPr>
           <a:xfrm>
-            <a:off x="2203704" y="4151376"/>
-            <a:ext cx="521208" cy="246888"/>
+            <a:off x="2203704" y="4297680"/>
+            <a:ext cx="521208" cy="283464"/>
           </a:xfrm>
           <a:prstGeom prst="rect">
             <a:avLst/>
@@ -14687,8 +14687,8 @@
         </p:nvSpPr>
         <p:spPr>
           <a:xfrm>
-            <a:off x="2743200" y="4151376"/>
-            <a:ext cx="2212848" cy="246888"/>
+            <a:off x="2743200" y="4297680"/>
+            <a:ext cx="2212848" cy="283464"/>
           </a:xfrm>
           <a:prstGeom prst="rect">
             <a:avLst/>
@@ -14712,8 +14712,8 @@
         </p:nvSpPr>
         <p:spPr>
           <a:xfrm>
-            <a:off x="2798064" y="4151376"/>
-            <a:ext cx="2139696" cy="246888"/>
+            <a:off x="2798064" y="4297680"/>
+            <a:ext cx="2139696" cy="283464"/>
           </a:xfrm>
           <a:prstGeom prst="rect">
             <a:avLst/>
@@ -14748,8 +14748,8 @@
         </p:nvSpPr>
         <p:spPr>
           <a:xfrm>
-            <a:off x="4956048" y="4151376"/>
-            <a:ext cx="1097280" cy="246888"/>
+            <a:off x="4956048" y="4297680"/>
+            <a:ext cx="1097280" cy="283464"/>
           </a:xfrm>
           <a:prstGeom prst="rect">
             <a:avLst/>
@@ -14773,8 +14773,8 @@
         </p:nvSpPr>
         <p:spPr>
           <a:xfrm>
-            <a:off x="5010912" y="4151376"/>
-            <a:ext cx="1024128" cy="246888"/>
+            <a:off x="5010912" y="4297680"/>
+            <a:ext cx="1024128" cy="283464"/>
           </a:xfrm>
           <a:prstGeom prst="rect">
             <a:avLst/>
@@ -14809,8 +14809,8 @@
         </p:nvSpPr>
         <p:spPr>
           <a:xfrm>
-            <a:off x="137160" y="4398264"/>
-            <a:ext cx="1261872" cy="246888"/>
+            <a:off x="137160" y="4581144"/>
+            <a:ext cx="1261872" cy="283464"/>
           </a:xfrm>
           <a:prstGeom prst="rect">
             <a:avLst/>
@@ -14834,8 +14834,8 @@
         </p:nvSpPr>
         <p:spPr>
           <a:xfrm>
-            <a:off x="192024" y="4398264"/>
-            <a:ext cx="1188720" cy="246888"/>
+            <a:off x="192024" y="4581144"/>
+            <a:ext cx="1188720" cy="283464"/>
           </a:xfrm>
           <a:prstGeom prst="rect">
             <a:avLst/>
@@ -14870,8 +14870,8 @@
         </p:nvSpPr>
         <p:spPr>
           <a:xfrm>
-            <a:off x="1399032" y="4398264"/>
-            <a:ext cx="749808" cy="246888"/>
+            <a:off x="1399032" y="4581144"/>
+            <a:ext cx="749808" cy="283464"/>
           </a:xfrm>
           <a:prstGeom prst="rect">
             <a:avLst/>
@@ -14895,8 +14895,8 @@
         </p:nvSpPr>
         <p:spPr>
           <a:xfrm>
-            <a:off x="1453896" y="4398264"/>
-            <a:ext cx="676656" cy="246888"/>
+            <a:off x="1453896" y="4581144"/>
+            <a:ext cx="676656" cy="283464"/>
           </a:xfrm>
           <a:prstGeom prst="rect">
             <a:avLst/>
@@ -14923,8 +14923,8 @@
         </p:nvSpPr>
         <p:spPr>
           <a:xfrm>
-            <a:off x="2148840" y="4398264"/>
-            <a:ext cx="594360" cy="246888"/>
+            <a:off x="2148840" y="4581144"/>
+            <a:ext cx="594360" cy="283464"/>
           </a:xfrm>
           <a:prstGeom prst="rect">
             <a:avLst/>
@@ -14948,8 +14948,8 @@
         </p:nvSpPr>
         <p:spPr>
           <a:xfrm>
-            <a:off x="2203704" y="4398264"/>
-            <a:ext cx="521208" cy="246888"/>
+            <a:off x="2203704" y="4581144"/>
+            <a:ext cx="521208" cy="283464"/>
           </a:xfrm>
           <a:prstGeom prst="rect">
             <a:avLst/>
@@ -14984,8 +14984,8 @@
         </p:nvSpPr>
         <p:spPr>
           <a:xfrm>
-            <a:off x="2743200" y="4398264"/>
-            <a:ext cx="2212848" cy="246888"/>
+            <a:off x="2743200" y="4581144"/>
+            <a:ext cx="2212848" cy="283464"/>
           </a:xfrm>
           <a:prstGeom prst="rect">
             <a:avLst/>
@@ -15009,8 +15009,8 @@
         </p:nvSpPr>
         <p:spPr>
           <a:xfrm>
-            <a:off x="2798064" y="4398264"/>
-            <a:ext cx="2139696" cy="246888"/>
+            <a:off x="2798064" y="4581144"/>
+            <a:ext cx="2139696" cy="283464"/>
           </a:xfrm>
           <a:prstGeom prst="rect">
             <a:avLst/>
@@ -15045,8 +15045,8 @@
         </p:nvSpPr>
         <p:spPr>
           <a:xfrm>
-            <a:off x="4956048" y="4398264"/>
-            <a:ext cx="1097280" cy="246888"/>
+            <a:off x="4956048" y="4581144"/>
+            <a:ext cx="1097280" cy="283464"/>
           </a:xfrm>
           <a:prstGeom prst="rect">
             <a:avLst/>
@@ -15070,8 +15070,8 @@
         </p:nvSpPr>
         <p:spPr>
           <a:xfrm>
-            <a:off x="5010912" y="4398264"/>
-            <a:ext cx="1024128" cy="246888"/>
+            <a:off x="5010912" y="4581144"/>
+            <a:ext cx="1024128" cy="283464"/>
           </a:xfrm>
           <a:prstGeom prst="rect">
             <a:avLst/>
@@ -15168,7 +15168,7 @@
         <p:spPr>
           <a:xfrm>
             <a:off x="5577840" y="3163824"/>
-            <a:ext cx="960120" cy="292608"/>
+            <a:ext cx="868680" cy="365760"/>
           </a:xfrm>
           <a:prstGeom prst="rect">
             <a:avLst/>
@@ -15193,7 +15193,7 @@
         <p:spPr>
           <a:xfrm>
             <a:off x="5632704" y="3163824"/>
-            <a:ext cx="886968" cy="292608"/>
+            <a:ext cx="795528" cy="365760"/>
           </a:xfrm>
           <a:prstGeom prst="rect">
             <a:avLst/>
@@ -15228,8 +15228,8 @@
         </p:nvSpPr>
         <p:spPr>
           <a:xfrm>
-            <a:off x="6537960" y="3163824"/>
-            <a:ext cx="502920" cy="292608"/>
+            <a:off x="6446520" y="3163824"/>
+            <a:ext cx="502920" cy="365760"/>
           </a:xfrm>
           <a:prstGeom prst="rect">
             <a:avLst/>
@@ -15253,8 +15253,8 @@
         </p:nvSpPr>
         <p:spPr>
           <a:xfrm>
-            <a:off x="6592824" y="3163824"/>
-            <a:ext cx="429768" cy="292608"/>
+            <a:off x="6501384" y="3163824"/>
+            <a:ext cx="429768" cy="365760"/>
           </a:xfrm>
           <a:prstGeom prst="rect">
             <a:avLst/>
@@ -15289,8 +15289,8 @@
         </p:nvSpPr>
         <p:spPr>
           <a:xfrm>
-            <a:off x="7040880" y="3163824"/>
-            <a:ext cx="1417320" cy="292608"/>
+            <a:off x="6949440" y="3163824"/>
+            <a:ext cx="1554480" cy="365760"/>
           </a:xfrm>
           <a:prstGeom prst="rect">
             <a:avLst/>
@@ -15314,8 +15314,8 @@
         </p:nvSpPr>
         <p:spPr>
           <a:xfrm>
-            <a:off x="7095744" y="3163824"/>
-            <a:ext cx="1344168" cy="292608"/>
+            <a:off x="7004304" y="3163824"/>
+            <a:ext cx="1481328" cy="365760"/>
           </a:xfrm>
           <a:prstGeom prst="rect">
             <a:avLst/>
@@ -15350,8 +15350,8 @@
         </p:nvSpPr>
         <p:spPr>
           <a:xfrm>
-            <a:off x="8458200" y="3163824"/>
-            <a:ext cx="548640" cy="292608"/>
+            <a:off x="8503920" y="3163824"/>
+            <a:ext cx="502920" cy="365760"/>
           </a:xfrm>
           <a:prstGeom prst="rect">
             <a:avLst/>
@@ -15375,8 +15375,8 @@
         </p:nvSpPr>
         <p:spPr>
           <a:xfrm>
-            <a:off x="8513064" y="3163824"/>
-            <a:ext cx="475488" cy="292608"/>
+            <a:off x="8558784" y="3163824"/>
+            <a:ext cx="429768" cy="365760"/>
           </a:xfrm>
           <a:prstGeom prst="rect">
             <a:avLst/>
@@ -15411,8 +15411,8 @@
         </p:nvSpPr>
         <p:spPr>
           <a:xfrm>
-            <a:off x="5577840" y="3456432"/>
-            <a:ext cx="960120" cy="292608"/>
+            <a:off x="5577840" y="3529584"/>
+            <a:ext cx="868680" cy="365760"/>
           </a:xfrm>
           <a:prstGeom prst="rect">
             <a:avLst/>
@@ -15436,8 +15436,8 @@
         </p:nvSpPr>
         <p:spPr>
           <a:xfrm>
-            <a:off x="5632704" y="3456432"/>
-            <a:ext cx="886968" cy="292608"/>
+            <a:off x="5632704" y="3529584"/>
+            <a:ext cx="795528" cy="365760"/>
           </a:xfrm>
           <a:prstGeom prst="rect">
             <a:avLst/>
@@ -15472,8 +15472,8 @@
         </p:nvSpPr>
         <p:spPr>
           <a:xfrm>
-            <a:off x="6537960" y="3456432"/>
-            <a:ext cx="502920" cy="292608"/>
+            <a:off x="6446520" y="3529584"/>
+            <a:ext cx="502920" cy="365760"/>
           </a:xfrm>
           <a:prstGeom prst="rect">
             <a:avLst/>
@@ -15497,8 +15497,8 @@
         </p:nvSpPr>
         <p:spPr>
           <a:xfrm>
-            <a:off x="6592824" y="3456432"/>
-            <a:ext cx="429768" cy="292608"/>
+            <a:off x="6501384" y="3529584"/>
+            <a:ext cx="429768" cy="365760"/>
           </a:xfrm>
           <a:prstGeom prst="rect">
             <a:avLst/>
@@ -15533,8 +15533,8 @@
         </p:nvSpPr>
         <p:spPr>
           <a:xfrm>
-            <a:off x="7040880" y="3456432"/>
-            <a:ext cx="1417320" cy="292608"/>
+            <a:off x="6949440" y="3529584"/>
+            <a:ext cx="1554480" cy="365760"/>
           </a:xfrm>
           <a:prstGeom prst="rect">
             <a:avLst/>
@@ -15558,8 +15558,8 @@
         </p:nvSpPr>
         <p:spPr>
           <a:xfrm>
-            <a:off x="7095744" y="3456432"/>
-            <a:ext cx="1344168" cy="292608"/>
+            <a:off x="7004304" y="3529584"/>
+            <a:ext cx="1481328" cy="365760"/>
           </a:xfrm>
           <a:prstGeom prst="rect">
             <a:avLst/>
@@ -15594,8 +15594,8 @@
         </p:nvSpPr>
         <p:spPr>
           <a:xfrm>
-            <a:off x="8458200" y="3456432"/>
-            <a:ext cx="548640" cy="292608"/>
+            <a:off x="8503920" y="3529584"/>
+            <a:ext cx="502920" cy="365760"/>
           </a:xfrm>
           <a:prstGeom prst="rect">
             <a:avLst/>
@@ -15619,8 +15619,8 @@
         </p:nvSpPr>
         <p:spPr>
           <a:xfrm>
-            <a:off x="8513064" y="3456432"/>
-            <a:ext cx="475488" cy="292608"/>
+            <a:off x="8558784" y="3529584"/>
+            <a:ext cx="429768" cy="365760"/>
           </a:xfrm>
           <a:prstGeom prst="rect">
             <a:avLst/>
@@ -15655,8 +15655,8 @@
         </p:nvSpPr>
         <p:spPr>
           <a:xfrm>
-            <a:off x="5577840" y="3749040"/>
-            <a:ext cx="960120" cy="292608"/>
+            <a:off x="5577840" y="3895344"/>
+            <a:ext cx="868680" cy="365760"/>
           </a:xfrm>
           <a:prstGeom prst="rect">
             <a:avLst/>
@@ -15680,8 +15680,8 @@
         </p:nvSpPr>
         <p:spPr>
           <a:xfrm>
-            <a:off x="5632704" y="3749040"/>
-            <a:ext cx="886968" cy="292608"/>
+            <a:off x="5632704" y="3895344"/>
+            <a:ext cx="795528" cy="365760"/>
           </a:xfrm>
           <a:prstGeom prst="rect">
             <a:avLst/>
@@ -15716,8 +15716,8 @@
         </p:nvSpPr>
         <p:spPr>
           <a:xfrm>
-            <a:off x="6537960" y="3749040"/>
-            <a:ext cx="502920" cy="292608"/>
+            <a:off x="6446520" y="3895344"/>
+            <a:ext cx="502920" cy="365760"/>
           </a:xfrm>
           <a:prstGeom prst="rect">
             <a:avLst/>
@@ -15741,8 +15741,8 @@
         </p:nvSpPr>
         <p:spPr>
           <a:xfrm>
-            <a:off x="6592824" y="3749040"/>
-            <a:ext cx="429768" cy="292608"/>
+            <a:off x="6501384" y="3895344"/>
+            <a:ext cx="429768" cy="365760"/>
           </a:xfrm>
           <a:prstGeom prst="rect">
             <a:avLst/>
@@ -15777,8 +15777,8 @@
         </p:nvSpPr>
         <p:spPr>
           <a:xfrm>
-            <a:off x="7040880" y="3749040"/>
-            <a:ext cx="1417320" cy="292608"/>
+            <a:off x="6949440" y="3895344"/>
+            <a:ext cx="1554480" cy="365760"/>
           </a:xfrm>
           <a:prstGeom prst="rect">
             <a:avLst/>
@@ -15802,8 +15802,8 @@
         </p:nvSpPr>
         <p:spPr>
           <a:xfrm>
-            <a:off x="7095744" y="3749040"/>
-            <a:ext cx="1344168" cy="292608"/>
+            <a:off x="7004304" y="3895344"/>
+            <a:ext cx="1481328" cy="365760"/>
           </a:xfrm>
           <a:prstGeom prst="rect">
             <a:avLst/>
@@ -15838,8 +15838,8 @@
         </p:nvSpPr>
         <p:spPr>
           <a:xfrm>
-            <a:off x="8458200" y="3749040"/>
-            <a:ext cx="548640" cy="292608"/>
+            <a:off x="8503920" y="3895344"/>
+            <a:ext cx="502920" cy="365760"/>
           </a:xfrm>
           <a:prstGeom prst="rect">
             <a:avLst/>
@@ -15863,8 +15863,8 @@
         </p:nvSpPr>
         <p:spPr>
           <a:xfrm>
-            <a:off x="8513064" y="3749040"/>
-            <a:ext cx="475488" cy="292608"/>
+            <a:off x="8558784" y="3895344"/>
+            <a:ext cx="429768" cy="365760"/>
           </a:xfrm>
           <a:prstGeom prst="rect">
             <a:avLst/>
@@ -15899,8 +15899,8 @@
         </p:nvSpPr>
         <p:spPr>
           <a:xfrm>
-            <a:off x="5577840" y="4041648"/>
-            <a:ext cx="960120" cy="292608"/>
+            <a:off x="5577840" y="4261104"/>
+            <a:ext cx="868680" cy="365760"/>
           </a:xfrm>
           <a:prstGeom prst="rect">
             <a:avLst/>
@@ -15924,8 +15924,8 @@
         </p:nvSpPr>
         <p:spPr>
           <a:xfrm>
-            <a:off x="5632704" y="4041648"/>
-            <a:ext cx="886968" cy="292608"/>
+            <a:off x="5632704" y="4261104"/>
+            <a:ext cx="795528" cy="365760"/>
           </a:xfrm>
           <a:prstGeom prst="rect">
             <a:avLst/>
@@ -15960,8 +15960,8 @@
         </p:nvSpPr>
         <p:spPr>
           <a:xfrm>
-            <a:off x="6537960" y="4041648"/>
-            <a:ext cx="502920" cy="292608"/>
+            <a:off x="6446520" y="4261104"/>
+            <a:ext cx="502920" cy="365760"/>
           </a:xfrm>
           <a:prstGeom prst="rect">
             <a:avLst/>
@@ -15985,8 +15985,8 @@
         </p:nvSpPr>
         <p:spPr>
           <a:xfrm>
-            <a:off x="6592824" y="4041648"/>
-            <a:ext cx="429768" cy="292608"/>
+            <a:off x="6501384" y="4261104"/>
+            <a:ext cx="429768" cy="365760"/>
           </a:xfrm>
           <a:prstGeom prst="rect">
             <a:avLst/>
@@ -16021,8 +16021,8 @@
         </p:nvSpPr>
         <p:spPr>
           <a:xfrm>
-            <a:off x="7040880" y="4041648"/>
-            <a:ext cx="1417320" cy="292608"/>
+            <a:off x="6949440" y="4261104"/>
+            <a:ext cx="1554480" cy="365760"/>
           </a:xfrm>
           <a:prstGeom prst="rect">
             <a:avLst/>
@@ -16046,8 +16046,8 @@
         </p:nvSpPr>
         <p:spPr>
           <a:xfrm>
-            <a:off x="7095744" y="4041648"/>
-            <a:ext cx="1344168" cy="292608"/>
+            <a:off x="7004304" y="4261104"/>
+            <a:ext cx="1481328" cy="365760"/>
           </a:xfrm>
           <a:prstGeom prst="rect">
             <a:avLst/>
@@ -16082,8 +16082,8 @@
         </p:nvSpPr>
         <p:spPr>
           <a:xfrm>
-            <a:off x="8458200" y="4041648"/>
-            <a:ext cx="548640" cy="292608"/>
+            <a:off x="8503920" y="4261104"/>
+            <a:ext cx="502920" cy="365760"/>
           </a:xfrm>
           <a:prstGeom prst="rect">
             <a:avLst/>
@@ -16107,8 +16107,8 @@
         </p:nvSpPr>
         <p:spPr>
           <a:xfrm>
-            <a:off x="8513064" y="4041648"/>
-            <a:ext cx="475488" cy="292608"/>
+            <a:off x="8558784" y="4261104"/>
+            <a:ext cx="429768" cy="365760"/>
           </a:xfrm>
           <a:prstGeom prst="rect">
             <a:avLst/>
@@ -21414,7 +21414,7 @@
         </p:nvGraphicFramePr>
         <p:xfrm>
           <a:off x="5303520" y="2980944"/>
-          <a:ext cx="3703320" cy="1682496"/>
+          <a:ext cx="3703320" cy="1554480"/>
         </p:xfrm>
         <a:graphic xmlns:a="http://schemas.openxmlformats.org/drawingml/2006/main">
           <a:graphicData uri="http://schemas.openxmlformats.org/drawingml/2006/chart">
@@ -21491,8 +21491,8 @@
         </p:nvSpPr>
         <p:spPr>
           <a:xfrm>
-            <a:off x="137160" y="3941064"/>
-            <a:ext cx="1554480" cy="265176"/>
+            <a:off x="137160" y="3739896"/>
+            <a:ext cx="1344168" cy="292608"/>
           </a:xfrm>
           <a:prstGeom prst="rect">
             <a:avLst/>
@@ -21516,8 +21516,8 @@
         </p:nvSpPr>
         <p:spPr>
           <a:xfrm>
-            <a:off x="192024" y="3941064"/>
-            <a:ext cx="1481328" cy="265176"/>
+            <a:off x="192024" y="3739896"/>
+            <a:ext cx="1271016" cy="292608"/>
           </a:xfrm>
           <a:prstGeom prst="rect">
             <a:avLst/>
@@ -21552,8 +21552,8 @@
         </p:nvSpPr>
         <p:spPr>
           <a:xfrm>
-            <a:off x="1691640" y="3941064"/>
-            <a:ext cx="2029968" cy="265176"/>
+            <a:off x="1481328" y="3739896"/>
+            <a:ext cx="2103120" cy="292608"/>
           </a:xfrm>
           <a:prstGeom prst="rect">
             <a:avLst/>
@@ -21577,8 +21577,8 @@
         </p:nvSpPr>
         <p:spPr>
           <a:xfrm>
-            <a:off x="1746504" y="3941064"/>
-            <a:ext cx="1956816" cy="265176"/>
+            <a:off x="1536192" y="3739896"/>
+            <a:ext cx="2029968" cy="292608"/>
           </a:xfrm>
           <a:prstGeom prst="rect">
             <a:avLst/>
@@ -21613,8 +21613,8 @@
         </p:nvSpPr>
         <p:spPr>
           <a:xfrm>
-            <a:off x="3721608" y="3941064"/>
-            <a:ext cx="1490472" cy="265176"/>
+            <a:off x="3584448" y="3739896"/>
+            <a:ext cx="1581912" cy="292608"/>
           </a:xfrm>
           <a:prstGeom prst="rect">
             <a:avLst/>
@@ -21638,8 +21638,8 @@
         </p:nvSpPr>
         <p:spPr>
           <a:xfrm>
-            <a:off x="3776472" y="3941064"/>
-            <a:ext cx="1417320" cy="265176"/>
+            <a:off x="3639312" y="3739896"/>
+            <a:ext cx="1508760" cy="292608"/>
           </a:xfrm>
           <a:prstGeom prst="rect">
             <a:avLst/>
@@ -21674,8 +21674,8 @@
         </p:nvSpPr>
         <p:spPr>
           <a:xfrm>
-            <a:off x="137160" y="4206240"/>
-            <a:ext cx="1554480" cy="265176"/>
+            <a:off x="137160" y="4032504"/>
+            <a:ext cx="1344168" cy="292608"/>
           </a:xfrm>
           <a:prstGeom prst="rect">
             <a:avLst/>
@@ -21699,8 +21699,8 @@
         </p:nvSpPr>
         <p:spPr>
           <a:xfrm>
-            <a:off x="192024" y="4206240"/>
-            <a:ext cx="1481328" cy="265176"/>
+            <a:off x="192024" y="4032504"/>
+            <a:ext cx="1271016" cy="292608"/>
           </a:xfrm>
           <a:prstGeom prst="rect">
             <a:avLst/>
@@ -21735,8 +21735,8 @@
         </p:nvSpPr>
         <p:spPr>
           <a:xfrm>
-            <a:off x="1691640" y="4206240"/>
-            <a:ext cx="2029968" cy="265176"/>
+            <a:off x="1481328" y="4032504"/>
+            <a:ext cx="2103120" cy="292608"/>
           </a:xfrm>
           <a:prstGeom prst="rect">
             <a:avLst/>
@@ -21760,8 +21760,8 @@
         </p:nvSpPr>
         <p:spPr>
           <a:xfrm>
-            <a:off x="1746504" y="4206240"/>
-            <a:ext cx="1956816" cy="265176"/>
+            <a:off x="1536192" y="4032504"/>
+            <a:ext cx="2029968" cy="292608"/>
           </a:xfrm>
           <a:prstGeom prst="rect">
             <a:avLst/>
@@ -21796,8 +21796,8 @@
         </p:nvSpPr>
         <p:spPr>
           <a:xfrm>
-            <a:off x="3721608" y="4206240"/>
-            <a:ext cx="1490472" cy="265176"/>
+            <a:off x="3584448" y="4032504"/>
+            <a:ext cx="1581912" cy="292608"/>
           </a:xfrm>
           <a:prstGeom prst="rect">
             <a:avLst/>
@@ -21821,8 +21821,8 @@
         </p:nvSpPr>
         <p:spPr>
           <a:xfrm>
-            <a:off x="3776472" y="4206240"/>
-            <a:ext cx="1417320" cy="265176"/>
+            <a:off x="3639312" y="4032504"/>
+            <a:ext cx="1508760" cy="292608"/>
           </a:xfrm>
           <a:prstGeom prst="rect">
             <a:avLst/>
@@ -21857,8 +21857,8 @@
         </p:nvSpPr>
         <p:spPr>
           <a:xfrm>
-            <a:off x="137160" y="4471416"/>
-            <a:ext cx="1554480" cy="265176"/>
+            <a:off x="137160" y="4325112"/>
+            <a:ext cx="1344168" cy="292608"/>
           </a:xfrm>
           <a:prstGeom prst="rect">
             <a:avLst/>
@@ -21882,8 +21882,8 @@
         </p:nvSpPr>
         <p:spPr>
           <a:xfrm>
-            <a:off x="192024" y="4471416"/>
-            <a:ext cx="1481328" cy="265176"/>
+            <a:off x="192024" y="4325112"/>
+            <a:ext cx="1271016" cy="292608"/>
           </a:xfrm>
           <a:prstGeom prst="rect">
             <a:avLst/>
@@ -21918,8 +21918,8 @@
         </p:nvSpPr>
         <p:spPr>
           <a:xfrm>
-            <a:off x="1691640" y="4471416"/>
-            <a:ext cx="2029968" cy="265176"/>
+            <a:off x="1481328" y="4325112"/>
+            <a:ext cx="2103120" cy="292608"/>
           </a:xfrm>
           <a:prstGeom prst="rect">
             <a:avLst/>
@@ -21943,8 +21943,8 @@
         </p:nvSpPr>
         <p:spPr>
           <a:xfrm>
-            <a:off x="1746504" y="4471416"/>
-            <a:ext cx="1956816" cy="265176"/>
+            <a:off x="1536192" y="4325112"/>
+            <a:ext cx="2029968" cy="292608"/>
           </a:xfrm>
           <a:prstGeom prst="rect">
             <a:avLst/>
@@ -21979,8 +21979,8 @@
         </p:nvSpPr>
         <p:spPr>
           <a:xfrm>
-            <a:off x="3721608" y="4471416"/>
-            <a:ext cx="1490472" cy="265176"/>
+            <a:off x="3584448" y="4325112"/>
+            <a:ext cx="1581912" cy="292608"/>
           </a:xfrm>
           <a:prstGeom prst="rect">
             <a:avLst/>
@@ -22004,8 +22004,8 @@
         </p:nvSpPr>
         <p:spPr>
           <a:xfrm>
-            <a:off x="3776472" y="4471416"/>
-            <a:ext cx="1417320" cy="265176"/>
+            <a:off x="3639312" y="4325112"/>
+            <a:ext cx="1508760" cy="292608"/>
           </a:xfrm>
           <a:prstGeom prst="rect">
             <a:avLst/>
@@ -22040,8 +22040,8 @@
         </p:nvSpPr>
         <p:spPr>
           <a:xfrm>
-            <a:off x="137160" y="4736592"/>
-            <a:ext cx="1554480" cy="265176"/>
+            <a:off x="137160" y="4617720"/>
+            <a:ext cx="1344168" cy="292608"/>
           </a:xfrm>
           <a:prstGeom prst="rect">
             <a:avLst/>
@@ -22065,8 +22065,8 @@
         </p:nvSpPr>
         <p:spPr>
           <a:xfrm>
-            <a:off x="192024" y="4736592"/>
-            <a:ext cx="1481328" cy="265176"/>
+            <a:off x="192024" y="4617720"/>
+            <a:ext cx="1271016" cy="292608"/>
           </a:xfrm>
           <a:prstGeom prst="rect">
             <a:avLst/>
@@ -22101,8 +22101,8 @@
         </p:nvSpPr>
         <p:spPr>
           <a:xfrm>
-            <a:off x="1691640" y="4736592"/>
-            <a:ext cx="2029968" cy="265176"/>
+            <a:off x="1481328" y="4617720"/>
+            <a:ext cx="2103120" cy="292608"/>
           </a:xfrm>
           <a:prstGeom prst="rect">
             <a:avLst/>
@@ -22126,8 +22126,8 @@
         </p:nvSpPr>
         <p:spPr>
           <a:xfrm>
-            <a:off x="1746504" y="4736592"/>
-            <a:ext cx="1956816" cy="265176"/>
+            <a:off x="1536192" y="4617720"/>
+            <a:ext cx="2029968" cy="292608"/>
           </a:xfrm>
           <a:prstGeom prst="rect">
             <a:avLst/>
@@ -22162,8 +22162,8 @@
         </p:nvSpPr>
         <p:spPr>
           <a:xfrm>
-            <a:off x="3721608" y="4736592"/>
-            <a:ext cx="1490472" cy="265176"/>
+            <a:off x="3584448" y="4617720"/>
+            <a:ext cx="1581912" cy="292608"/>
           </a:xfrm>
           <a:prstGeom prst="rect">
             <a:avLst/>
@@ -22187,8 +22187,8 @@
         </p:nvSpPr>
         <p:spPr>
           <a:xfrm>
-            <a:off x="3776472" y="4736592"/>
-            <a:ext cx="1417320" cy="265176"/>
+            <a:off x="3639312" y="4617720"/>
+            <a:ext cx="1508760" cy="292608"/>
           </a:xfrm>
           <a:prstGeom prst="rect">
             <a:avLst/>
@@ -22223,8 +22223,8 @@
         </p:nvSpPr>
         <p:spPr>
           <a:xfrm>
-            <a:off x="137160" y="4640580"/>
-            <a:ext cx="5029200" cy="201168"/>
+            <a:off x="137160" y="4887468"/>
+            <a:ext cx="5029200" cy="256032"/>
           </a:xfrm>
           <a:prstGeom prst="rect">
             <a:avLst/>
@@ -22240,14 +22240,14 @@
               <a:buNone/>
             </a:pPr>
             <a:r>
-              <a:rPr lang="en-US" sz="750" dirty="0">
+              <a:rPr lang="en-US" sz="900" dirty="0">
                 <a:solidFill>
                   <a:srgbClr val="D97706"/>
                 </a:solidFill>
               </a:rPr>
               <a:t>⚠  Q3 Attrition: 6 departures (5.4% quarterly) — 3 engineering to FAANG. Comp bands adjusted +12% for senior engineers.</a:t>
             </a:r>
-            <a:endParaRPr lang="en-US" sz="750" dirty="0"/>
+            <a:endParaRPr lang="en-US" sz="900" dirty="0"/>
           </a:p>
         </p:txBody>
       </p:sp>
